--- a/Apresentações/10 - Orientação a Objetos.pptx
+++ b/Apresentações/10 - Orientação a Objetos.pptx
@@ -24493,8 +24493,8 @@
         </p:nvSpPr>
         <p:spPr bwMode="auto">
           <a:xfrm>
-            <a:off x="323528" y="771550"/>
-            <a:ext cx="8352928" cy="3816424"/>
+            <a:off x="971600" y="771550"/>
+            <a:ext cx="7704856" cy="3816424"/>
           </a:xfrm>
           <a:prstGeom prst="rect">
             <a:avLst/>
@@ -27543,64 +27543,85 @@
           <a:p>
             <a:pPr algn="just"/>
             <a:r>
-              <a:rPr lang="pt-BR" sz="2800" dirty="0"/>
+              <a:rPr lang="pt-BR" sz="2400" dirty="0"/>
               <a:t>Classe </a:t>
             </a:r>
             <a:r>
-              <a:rPr lang="pt-BR" sz="2800" dirty="0" err="1"/>
+              <a:rPr lang="pt-BR" sz="2400" dirty="0" err="1"/>
               <a:t>PoligonoRegular</a:t>
             </a:r>
-            <a:endParaRPr lang="pt-BR" sz="2800" dirty="0"/>
+            <a:endParaRPr lang="pt-BR" sz="2400" dirty="0"/>
           </a:p>
           <a:p>
             <a:pPr algn="just"/>
             <a:r>
-              <a:rPr lang="pt-BR" sz="2800" dirty="0"/>
+              <a:rPr lang="pt-BR" sz="2400" dirty="0"/>
               <a:t>Atributos: número de lados, tamanho do lado</a:t>
             </a:r>
           </a:p>
           <a:p>
             <a:pPr algn="just"/>
             <a:r>
-              <a:rPr lang="pt-BR" sz="2800" dirty="0"/>
-              <a:t>Métodos: cálculo do perímetro, </a:t>
+              <a:rPr lang="pt-BR" sz="2400" dirty="0"/>
+              <a:t>Métodos: cálculo do </a:t>
+            </a:r>
+            <a:r>
+              <a:rPr lang="pt-BR" sz="2400" dirty="0" err="1"/>
+              <a:t>perimetro</a:t>
+            </a:r>
+            <a:r>
+              <a:rPr lang="pt-BR" sz="2400" dirty="0"/>
+              <a:t>, </a:t>
             </a:r>
           </a:p>
           <a:p>
             <a:pPr algn="just"/>
             <a:r>
-              <a:rPr lang="pt-BR" sz="2800" dirty="0"/>
+              <a:rPr lang="pt-BR" sz="2400" dirty="0"/>
               <a:t>               Não implementada</a:t>
             </a:r>
           </a:p>
           <a:p>
             <a:pPr algn="just"/>
             <a:r>
-              <a:rPr lang="pt-BR" sz="2800" dirty="0"/>
+              <a:rPr lang="pt-BR" sz="2400" dirty="0"/>
               <a:t>Classe Triangulo</a:t>
             </a:r>
           </a:p>
           <a:p>
             <a:pPr algn="just"/>
             <a:r>
-              <a:rPr lang="pt-BR" sz="2800" dirty="0"/>
-              <a:t>	redefine o método de cálculo de área</a:t>
-            </a:r>
+              <a:rPr lang="pt-BR" sz="2400" dirty="0"/>
+              <a:t>	redefine o método de cálculo de </a:t>
+            </a:r>
+            <a:r>
+              <a:rPr lang="pt-BR" sz="2400" dirty="0" err="1"/>
+              <a:t>perimetro</a:t>
+            </a:r>
+            <a:endParaRPr lang="pt-BR" sz="2400" dirty="0"/>
           </a:p>
           <a:p>
             <a:pPr algn="just"/>
             <a:r>
-              <a:rPr lang="pt-BR" sz="2800" dirty="0"/>
+              <a:rPr lang="pt-BR" sz="2400" dirty="0"/>
               <a:t>Classe Quadrado</a:t>
             </a:r>
           </a:p>
           <a:p>
             <a:pPr algn="just"/>
             <a:r>
-              <a:rPr lang="pt-BR" sz="2800" dirty="0"/>
-              <a:t>	redefine o método de cálculo de área </a:t>
-            </a:r>
-            <a:endParaRPr lang="pt-BR" altLang="pt-BR" sz="2000" dirty="0">
+              <a:rPr lang="pt-BR" sz="2400" dirty="0"/>
+              <a:t>	redefine o método de cálculo de </a:t>
+            </a:r>
+            <a:r>
+              <a:rPr lang="pt-BR" sz="2400" dirty="0" err="1"/>
+              <a:t>perimetro</a:t>
+            </a:r>
+            <a:r>
+              <a:rPr lang="pt-BR" sz="2400" dirty="0"/>
+              <a:t> </a:t>
+            </a:r>
+            <a:endParaRPr lang="pt-BR" altLang="pt-BR" sz="2400" dirty="0">
               <a:ea typeface="Arial Unicode MS" pitchFamily="34" charset="-128"/>
             </a:endParaRPr>
           </a:p>
